--- a/docs/04_배포자료/슬라이드/22주차-게임이두개다.pptx
+++ b/docs/04_배포자료/슬라이드/22주차-게임이두개다.pptx
@@ -3845,7 +3845,7 @@
       </p:sp>
       <p:pic>
         <p:nvPicPr>
-          <p:cNvPr id="19" name="Image 0" descr="C:\Users\user\Github\WaveBreaker\docs\04_배포자료\슬라이드\shots2\final\109_FirstConnect.png">    </p:cNvPr>
+          <p:cNvPr id="19" name="Image 0" descr="D:\Github\WaveBreaker\docs\04_배포자료\슬라이드\shots2\final\109_FirstConnect.png">    </p:cNvPr>
           <p:cNvPicPr>
             <a:picLocks noChangeAspect="1"/>
           </p:cNvPicPr>
@@ -15185,7 +15185,7 @@
                 <a:ea typeface="Consolas" pitchFamily="34" charset="-122"/>
                 <a:cs typeface="Consolas" pitchFamily="34" charset="-120"/>
               </a:rPr>
-              <a:t>2.0.2</a:t>
+              <a:t>3.0.0</a:t>
             </a:r>
             <a:endParaRPr lang="en-US" sz="1200" dirty="0"/>
           </a:p>
@@ -15605,7 +15605,7 @@
                 <a:ea typeface="Consolas" pitchFamily="34" charset="-122"/>
                 <a:cs typeface="Consolas" pitchFamily="34" charset="-120"/>
               </a:rPr>
-              <a:t>3.7.4</a:t>
+              <a:t>3.8.0</a:t>
             </a:r>
             <a:endParaRPr lang="en-US" sz="1200" dirty="0"/>
           </a:p>
@@ -15888,7 +15888,7 @@
                 <a:ea typeface="Pretendard Light" pitchFamily="34" charset="-122"/>
                 <a:cs typeface="Pretendard Light" pitchFamily="34" charset="-120"/>
               </a:rPr>
-              <a:t>Unity 6.5(6000.5.4f1) 기준 버전이다. 설치는 하나씩 끝나고 다음 걸 한다. 인터넷이 느리면 5분 이상 걸린다 — 중간에 유니티를 끄지 않는다.</a:t>
+              <a:t>Unity 6.6(6000.6.3f1) 기준 버전이다. 설치는 하나씩 끝나고 다음 걸 한다. 인터넷이 느리면 5분 이상 걸린다 — 중간에 유니티를 끄지 않는다.</a:t>
             </a:r>
             <a:endParaRPr lang="en-US" sz="1200" dirty="0"/>
           </a:p>
